--- a/powerpoints/聽說 AI 很聰明？其實它是超厲害的「文字接龍高手」！.pptx
+++ b/powerpoints/聽說 AI 很聰明？其實它是超厲害的「文字接龍高手」！.pptx
@@ -311,7 +311,7 @@
           <a:p>
             <a:fld id="{5BCAD085-E8A6-8845-BD4E-CB4CCA059FC4}" type="datetimeFigureOut">
               <a:rPr lang="en-US" smtClean="0"/>
-              <a:t>7/28/26</a:t>
+              <a:t>7/28/2026</a:t>
             </a:fld>
             <a:endParaRPr lang="en-US"/>
           </a:p>
@@ -479,7 +479,7 @@
           <a:p>
             <a:fld id="{5BCAD085-E8A6-8845-BD4E-CB4CCA059FC4}" type="datetimeFigureOut">
               <a:rPr lang="en-US" smtClean="0"/>
-              <a:t>7/28/26</a:t>
+              <a:t>7/28/2026</a:t>
             </a:fld>
             <a:endParaRPr lang="en-US"/>
           </a:p>
@@ -657,7 +657,7 @@
           <a:p>
             <a:fld id="{5BCAD085-E8A6-8845-BD4E-CB4CCA059FC4}" type="datetimeFigureOut">
               <a:rPr lang="en-US" smtClean="0"/>
-              <a:t>7/28/26</a:t>
+              <a:t>7/28/2026</a:t>
             </a:fld>
             <a:endParaRPr lang="en-US"/>
           </a:p>
@@ -825,7 +825,7 @@
           <a:p>
             <a:fld id="{5BCAD085-E8A6-8845-BD4E-CB4CCA059FC4}" type="datetimeFigureOut">
               <a:rPr lang="en-US" smtClean="0"/>
-              <a:t>7/28/26</a:t>
+              <a:t>7/28/2026</a:t>
             </a:fld>
             <a:endParaRPr lang="en-US"/>
           </a:p>
@@ -1070,7 +1070,7 @@
           <a:p>
             <a:fld id="{5BCAD085-E8A6-8845-BD4E-CB4CCA059FC4}" type="datetimeFigureOut">
               <a:rPr lang="en-US" smtClean="0"/>
-              <a:t>7/28/26</a:t>
+              <a:t>7/28/2026</a:t>
             </a:fld>
             <a:endParaRPr lang="en-US"/>
           </a:p>
@@ -1355,7 +1355,7 @@
           <a:p>
             <a:fld id="{5BCAD085-E8A6-8845-BD4E-CB4CCA059FC4}" type="datetimeFigureOut">
               <a:rPr lang="en-US" smtClean="0"/>
-              <a:t>7/28/26</a:t>
+              <a:t>7/28/2026</a:t>
             </a:fld>
             <a:endParaRPr lang="en-US"/>
           </a:p>
@@ -1774,7 +1774,7 @@
           <a:p>
             <a:fld id="{5BCAD085-E8A6-8845-BD4E-CB4CCA059FC4}" type="datetimeFigureOut">
               <a:rPr lang="en-US" smtClean="0"/>
-              <a:t>7/28/26</a:t>
+              <a:t>7/28/2026</a:t>
             </a:fld>
             <a:endParaRPr lang="en-US"/>
           </a:p>
@@ -1891,7 +1891,7 @@
           <a:p>
             <a:fld id="{5BCAD085-E8A6-8845-BD4E-CB4CCA059FC4}" type="datetimeFigureOut">
               <a:rPr lang="en-US" smtClean="0"/>
-              <a:t>7/28/26</a:t>
+              <a:t>7/28/2026</a:t>
             </a:fld>
             <a:endParaRPr lang="en-US"/>
           </a:p>
@@ -1986,7 +1986,7 @@
           <a:p>
             <a:fld id="{5BCAD085-E8A6-8845-BD4E-CB4CCA059FC4}" type="datetimeFigureOut">
               <a:rPr lang="en-US" smtClean="0"/>
-              <a:t>7/28/26</a:t>
+              <a:t>7/28/2026</a:t>
             </a:fld>
             <a:endParaRPr lang="en-US"/>
           </a:p>
@@ -2261,7 +2261,7 @@
           <a:p>
             <a:fld id="{5BCAD085-E8A6-8845-BD4E-CB4CCA059FC4}" type="datetimeFigureOut">
               <a:rPr lang="en-US" smtClean="0"/>
-              <a:t>7/28/26</a:t>
+              <a:t>7/28/2026</a:t>
             </a:fld>
             <a:endParaRPr lang="en-US"/>
           </a:p>
@@ -2513,7 +2513,7 @@
           <a:p>
             <a:fld id="{5BCAD085-E8A6-8845-BD4E-CB4CCA059FC4}" type="datetimeFigureOut">
               <a:rPr lang="en-US" smtClean="0"/>
-              <a:t>7/28/26</a:t>
+              <a:t>7/28/2026</a:t>
             </a:fld>
             <a:endParaRPr lang="en-US"/>
           </a:p>
@@ -2724,7 +2724,7 @@
           <a:p>
             <a:fld id="{5BCAD085-E8A6-8845-BD4E-CB4CCA059FC4}" type="datetimeFigureOut">
               <a:rPr lang="en-US" smtClean="0"/>
-              <a:t>7/28/26</a:t>
+              <a:t>7/28/2026</a:t>
             </a:fld>
             <a:endParaRPr lang="en-US"/>
           </a:p>
@@ -3390,6 +3390,18 @@
   <p:clrMapOvr>
     <a:masterClrMapping/>
   </p:clrMapOvr>
+  <mc:AlternateContent xmlns:mc="http://schemas.openxmlformats.org/markup-compatibility/2006">
+    <mc:Choice xmlns:p14="http://schemas.microsoft.com/office/powerpoint/2010/main" Requires="p14">
+      <p:transition spd="slow" p14:dur="2000">
+        <p:cut/>
+      </p:transition>
+    </mc:Choice>
+    <mc:Fallback>
+      <p:transition spd="slow">
+        <p:cut/>
+      </p:transition>
+    </mc:Fallback>
+  </mc:AlternateContent>
 </p:sld>
 </file>
 
@@ -3734,6 +3746,18 @@
   <p:clrMapOvr>
     <a:masterClrMapping/>
   </p:clrMapOvr>
+  <mc:AlternateContent xmlns:mc="http://schemas.openxmlformats.org/markup-compatibility/2006">
+    <mc:Choice xmlns:p14="http://schemas.microsoft.com/office/powerpoint/2010/main" Requires="p14">
+      <p:transition spd="slow" p14:dur="2000">
+        <p:cut/>
+      </p:transition>
+    </mc:Choice>
+    <mc:Fallback>
+      <p:transition spd="slow">
+        <p:cut/>
+      </p:transition>
+    </mc:Fallback>
+  </mc:AlternateContent>
 </p:sld>
 </file>
 
@@ -4383,6 +4407,18 @@
   <p:clrMapOvr>
     <a:masterClrMapping/>
   </p:clrMapOvr>
+  <mc:AlternateContent xmlns:mc="http://schemas.openxmlformats.org/markup-compatibility/2006">
+    <mc:Choice xmlns:p14="http://schemas.microsoft.com/office/powerpoint/2010/main" Requires="p14">
+      <p:transition spd="slow" p14:dur="2000">
+        <p:cut/>
+      </p:transition>
+    </mc:Choice>
+    <mc:Fallback>
+      <p:transition spd="slow">
+        <p:cut/>
+      </p:transition>
+    </mc:Fallback>
+  </mc:AlternateContent>
 </p:sld>
 </file>
 
@@ -4779,6 +4815,18 @@
   <p:clrMapOvr>
     <a:masterClrMapping/>
   </p:clrMapOvr>
+  <mc:AlternateContent xmlns:mc="http://schemas.openxmlformats.org/markup-compatibility/2006">
+    <mc:Choice xmlns:p14="http://schemas.microsoft.com/office/powerpoint/2010/main" Requires="p14">
+      <p:transition spd="slow" p14:dur="2000">
+        <p:cut/>
+      </p:transition>
+    </mc:Choice>
+    <mc:Fallback>
+      <p:transition spd="slow">
+        <p:cut/>
+      </p:transition>
+    </mc:Fallback>
+  </mc:AlternateContent>
 </p:sld>
 </file>
 
@@ -5083,29 +5131,102 @@
               </a:lnSpc>
             </a:pPr>
             <a:r>
-              <a:rPr sz="1350" b="0" i="0" u="none">
+              <a:rPr sz="1350" b="0" i="0" u="none" dirty="0">
                 <a:solidFill>
                   <a:srgbClr val="334155"/>
                 </a:solidFill>
                 <a:latin typeface="Noto Sans TC"/>
               </a:rPr>
-              <a:t>1. 輸入：「今天 天氣 很」</a:t>
-            </a:r>
-            <a:r>
+              <a:t>1. </a:t>
+            </a:r>
+            <a:r>
+              <a:rPr sz="1350" b="0" i="0" u="none" dirty="0" err="1">
+                <a:solidFill>
+                  <a:srgbClr val="334155"/>
+                </a:solidFill>
+                <a:latin typeface="Noto Sans TC"/>
+              </a:rPr>
+              <a:t>輸入</a:t>
+            </a:r>
+            <a:r>
+              <a:rPr sz="1350" b="0" i="0" u="none" dirty="0">
+                <a:solidFill>
+                  <a:srgbClr val="334155"/>
+                </a:solidFill>
+                <a:latin typeface="Noto Sans TC"/>
+              </a:rPr>
+              <a:t>：「</a:t>
+            </a:r>
+            <a:r>
+              <a:rPr sz="1350" b="0" i="0" u="none" dirty="0" err="1">
+                <a:solidFill>
+                  <a:srgbClr val="334155"/>
+                </a:solidFill>
+                <a:latin typeface="Noto Sans TC"/>
+              </a:rPr>
+              <a:t>今天</a:t>
+            </a:r>
+            <a:r>
+              <a:rPr sz="1350" b="0" i="0" u="none" dirty="0">
+                <a:solidFill>
+                  <a:srgbClr val="334155"/>
+                </a:solidFill>
+                <a:latin typeface="Noto Sans TC"/>
+              </a:rPr>
+              <a:t> </a:t>
+            </a:r>
+            <a:r>
+              <a:rPr sz="1350" b="0" i="0" u="none" dirty="0" err="1">
+                <a:solidFill>
+                  <a:srgbClr val="334155"/>
+                </a:solidFill>
+                <a:latin typeface="Noto Sans TC"/>
+              </a:rPr>
+              <a:t>天氣</a:t>
+            </a:r>
+            <a:r>
+              <a:rPr sz="1350" b="0" i="0" u="none" dirty="0">
+                <a:solidFill>
+                  <a:srgbClr val="334155"/>
+                </a:solidFill>
+                <a:latin typeface="Noto Sans TC"/>
+              </a:rPr>
+              <a:t> 很」</a:t>
+            </a:r>
+            <a:r>
+              <a:rPr dirty="0"/>
               <a:t>
 </a:t>
             </a:r>
             <a:r>
-              <a:rPr sz="1350" b="0" i="0" u="none">
+              <a:rPr sz="1350" b="0" i="0" u="none" dirty="0">
                 <a:solidFill>
                   <a:srgbClr val="334155"/>
                 </a:solidFill>
                 <a:latin typeface="Noto Sans TC"/>
               </a:rPr>
-              <a:t> 2. 預測機率最高的字：</a:t>
-            </a:r>
-            <a:r>
-              <a:rPr sz="1350" b="1" i="0" u="none">
+              <a:t> 2. </a:t>
+            </a:r>
+            <a:r>
+              <a:rPr sz="1350" b="0" i="0" u="none" dirty="0" err="1">
+                <a:solidFill>
+                  <a:srgbClr val="334155"/>
+                </a:solidFill>
+                <a:latin typeface="Noto Sans TC"/>
+              </a:rPr>
+              <a:t>預測機率最高的字</a:t>
+            </a:r>
+            <a:r>
+              <a:rPr sz="1350" b="0" i="0" u="none" dirty="0">
+                <a:solidFill>
+                  <a:srgbClr val="334155"/>
+                </a:solidFill>
+                <a:latin typeface="Noto Sans TC"/>
+              </a:rPr>
+              <a:t>：</a:t>
+            </a:r>
+            <a:r>
+              <a:rPr sz="1350" b="1" i="0" u="none" dirty="0">
                 <a:solidFill>
                   <a:srgbClr val="0284C7"/>
                 </a:solidFill>
@@ -5114,17 +5235,90 @@
               <a:t>「好」(95%)</a:t>
             </a:r>
             <a:r>
+              <a:rPr dirty="0"/>
               <a:t>
 </a:t>
             </a:r>
             <a:r>
-              <a:rPr sz="1350" b="0" i="0" u="none">
+              <a:rPr sz="1350" b="0" i="0" u="none" dirty="0">
                 <a:solidFill>
                   <a:srgbClr val="334155"/>
                 </a:solidFill>
                 <a:latin typeface="Noto Sans TC"/>
               </a:rPr>
-              <a:t> 3. 組合新題目：「今天 天氣 很 好」➡️ 繼續猜下一個字！</a:t>
+              <a:t> 3. </a:t>
+            </a:r>
+            <a:r>
+              <a:rPr sz="1350" b="0" i="0" u="none" dirty="0" err="1">
+                <a:solidFill>
+                  <a:srgbClr val="334155"/>
+                </a:solidFill>
+                <a:latin typeface="Noto Sans TC"/>
+              </a:rPr>
+              <a:t>組合新題目</a:t>
+            </a:r>
+            <a:r>
+              <a:rPr sz="1350" b="0" i="0" u="none" dirty="0">
+                <a:solidFill>
+                  <a:srgbClr val="334155"/>
+                </a:solidFill>
+                <a:latin typeface="Noto Sans TC"/>
+              </a:rPr>
+              <a:t>：「</a:t>
+            </a:r>
+            <a:r>
+              <a:rPr sz="1350" b="0" i="0" u="none" dirty="0" err="1">
+                <a:solidFill>
+                  <a:srgbClr val="334155"/>
+                </a:solidFill>
+                <a:latin typeface="Noto Sans TC"/>
+              </a:rPr>
+              <a:t>今天</a:t>
+            </a:r>
+            <a:r>
+              <a:rPr sz="1350" b="0" i="0" u="none" dirty="0">
+                <a:solidFill>
+                  <a:srgbClr val="334155"/>
+                </a:solidFill>
+                <a:latin typeface="Noto Sans TC"/>
+              </a:rPr>
+              <a:t> </a:t>
+            </a:r>
+            <a:r>
+              <a:rPr sz="1350" b="0" i="0" u="none" dirty="0" err="1">
+                <a:solidFill>
+                  <a:srgbClr val="334155"/>
+                </a:solidFill>
+                <a:latin typeface="Noto Sans TC"/>
+              </a:rPr>
+              <a:t>天氣</a:t>
+            </a:r>
+            <a:r>
+              <a:rPr sz="1350" b="0" i="0" u="none" dirty="0">
+                <a:solidFill>
+                  <a:srgbClr val="334155"/>
+                </a:solidFill>
+                <a:latin typeface="Noto Sans TC"/>
+              </a:rPr>
+              <a:t> 很 好」➡️ </a:t>
+            </a:r>
+            <a:r>
+              <a:rPr sz="1350" b="0" i="0" u="none" dirty="0" err="1">
+                <a:solidFill>
+                  <a:srgbClr val="334155"/>
+                </a:solidFill>
+                <a:latin typeface="Noto Sans TC"/>
+              </a:rPr>
+              <a:t>繼續猜下一個字</a:t>
+            </a:r>
+            <a:r>
+              <a:rPr sz="1350" b="0" i="0" u="none" dirty="0">
+                <a:solidFill>
+                  <a:srgbClr val="334155"/>
+                </a:solidFill>
+                <a:latin typeface="Noto Sans TC"/>
+              </a:rPr>
+              <a:t>！</a:t>
             </a:r>
           </a:p>
         </p:txBody>
@@ -5134,6 +5328,18 @@
   <p:clrMapOvr>
     <a:masterClrMapping/>
   </p:clrMapOvr>
+  <mc:AlternateContent xmlns:mc="http://schemas.openxmlformats.org/markup-compatibility/2006">
+    <mc:Choice xmlns:p14="http://schemas.microsoft.com/office/powerpoint/2010/main" Requires="p14">
+      <p:transition spd="slow" p14:dur="2000">
+        <p:cut/>
+      </p:transition>
+    </mc:Choice>
+    <mc:Fallback>
+      <p:transition spd="slow">
+        <p:cut/>
+      </p:transition>
+    </mc:Fallback>
+  </mc:AlternateContent>
 </p:sld>
 </file>
 
@@ -5638,6 +5844,18 @@
   <p:clrMapOvr>
     <a:masterClrMapping/>
   </p:clrMapOvr>
+  <mc:AlternateContent xmlns:mc="http://schemas.openxmlformats.org/markup-compatibility/2006">
+    <mc:Choice xmlns:p14="http://schemas.microsoft.com/office/powerpoint/2010/main" Requires="p14">
+      <p:transition spd="slow" p14:dur="2000">
+        <p:cut/>
+      </p:transition>
+    </mc:Choice>
+    <mc:Fallback>
+      <p:transition spd="slow">
+        <p:cut/>
+      </p:transition>
+    </mc:Fallback>
+  </mc:AlternateContent>
 </p:sld>
 </file>
 
@@ -6014,13 +6232,22 @@
           <a:p>
             <a:pPr algn="l"/>
             <a:r>
-              <a:rPr sz="2850" b="1" i="0" u="none">
+              <a:rPr sz="2850" b="1" i="0" u="none" dirty="0" err="1">
                 <a:solidFill>
                   <a:srgbClr val="0F172A"/>
                 </a:solidFill>
                 <a:latin typeface="Noto Sans TC"/>
               </a:rPr>
-              <a:t>核心武器：注意力機制 (Attention)</a:t>
+              <a:t>核心武器：注意力機制</a:t>
+            </a:r>
+            <a:r>
+              <a:rPr sz="2850" b="1" i="0" u="none" dirty="0">
+                <a:solidFill>
+                  <a:srgbClr val="0F172A"/>
+                </a:solidFill>
+                <a:latin typeface="Noto Sans TC"/>
+              </a:rPr>
+              <a:t> (Attention)</a:t>
             </a:r>
           </a:p>
         </p:txBody>
@@ -6030,6 +6257,18 @@
   <p:clrMapOvr>
     <a:masterClrMapping/>
   </p:clrMapOvr>
+  <mc:AlternateContent xmlns:mc="http://schemas.openxmlformats.org/markup-compatibility/2006">
+    <mc:Choice xmlns:p14="http://schemas.microsoft.com/office/powerpoint/2010/main" Requires="p14">
+      <p:transition spd="slow" p14:dur="2000">
+        <p:cut/>
+      </p:transition>
+    </mc:Choice>
+    <mc:Fallback>
+      <p:transition spd="slow">
+        <p:cut/>
+      </p:transition>
+    </mc:Fallback>
+  </mc:AlternateContent>
 </p:sld>
 </file>
 
@@ -6605,6 +6844,18 @@
   <p:clrMapOvr>
     <a:masterClrMapping/>
   </p:clrMapOvr>
+  <mc:AlternateContent xmlns:mc="http://schemas.openxmlformats.org/markup-compatibility/2006">
+    <mc:Choice xmlns:p14="http://schemas.microsoft.com/office/powerpoint/2010/main" Requires="p14">
+      <p:transition spd="slow" p14:dur="2000">
+        <p:cut/>
+      </p:transition>
+    </mc:Choice>
+    <mc:Fallback>
+      <p:transition spd="slow">
+        <p:cut/>
+      </p:transition>
+    </mc:Fallback>
+  </mc:AlternateContent>
 </p:sld>
 </file>
 
@@ -6983,6 +7234,18 @@
   <p:clrMapOvr>
     <a:masterClrMapping/>
   </p:clrMapOvr>
+  <mc:AlternateContent xmlns:mc="http://schemas.openxmlformats.org/markup-compatibility/2006">
+    <mc:Choice xmlns:p14="http://schemas.microsoft.com/office/powerpoint/2010/main" Requires="p14">
+      <p:transition spd="slow" p14:dur="2000">
+        <p:cut/>
+      </p:transition>
+    </mc:Choice>
+    <mc:Fallback>
+      <p:transition spd="slow">
+        <p:cut/>
+      </p:transition>
+    </mc:Fallback>
+  </mc:AlternateContent>
 </p:sld>
 </file>
 
@@ -7146,26 +7409,90 @@
               </a:lnSpc>
             </a:pPr>
             <a:r>
-              <a:rPr sz="1350" b="1" i="0" u="none">
+              <a:rPr sz="1350" b="1" i="0" u="none" dirty="0">
                 <a:solidFill>
                   <a:srgbClr val="334155"/>
                 </a:solidFill>
                 <a:latin typeface="Noto Sans TC"/>
               </a:rPr>
-              <a:t>1. 統計相關 ≠ 因果邏輯</a:t>
-            </a:r>
-            <a:r>
+              <a:t>1. </a:t>
+            </a:r>
+            <a:r>
+              <a:rPr sz="1350" b="1" i="0" u="none" dirty="0" err="1">
+                <a:solidFill>
+                  <a:srgbClr val="334155"/>
+                </a:solidFill>
+                <a:latin typeface="Noto Sans TC"/>
+              </a:rPr>
+              <a:t>統計相關</a:t>
+            </a:r>
+            <a:r>
+              <a:rPr sz="1350" b="1" i="0" u="none" dirty="0">
+                <a:solidFill>
+                  <a:srgbClr val="334155"/>
+                </a:solidFill>
+                <a:latin typeface="Noto Sans TC"/>
+              </a:rPr>
+              <a:t> ≠ </a:t>
+            </a:r>
+            <a:r>
+              <a:rPr sz="1350" b="1" i="0" u="none" dirty="0" err="1">
+                <a:solidFill>
+                  <a:srgbClr val="334155"/>
+                </a:solidFill>
+                <a:latin typeface="Noto Sans TC"/>
+              </a:rPr>
+              <a:t>因果邏輯</a:t>
+            </a:r>
+            <a:r>
+              <a:rPr dirty="0"/>
               <a:t>
 </a:t>
             </a:r>
             <a:r>
-              <a:rPr sz="1350" b="0" i="0" u="none">
+              <a:rPr sz="1350" b="0" i="0" u="none" dirty="0">
                 <a:solidFill>
                   <a:srgbClr val="334155"/>
                 </a:solidFill>
                 <a:latin typeface="Noto Sans TC"/>
               </a:rPr>
-              <a:t> AI 知道「打雷」後面常接「閃電」，但不懂真實物理原理。</a:t>
+              <a:t> AI </a:t>
+            </a:r>
+            <a:r>
+              <a:rPr sz="1350" b="0" i="0" u="none" dirty="0" err="1">
+                <a:solidFill>
+                  <a:srgbClr val="334155"/>
+                </a:solidFill>
+                <a:latin typeface="Noto Sans TC"/>
+              </a:rPr>
+              <a:t>知道「打雷」後面常接「閃電</a:t>
+            </a:r>
+            <a:r>
+              <a:rPr sz="1350" b="0" i="0" u="none" dirty="0">
+                <a:solidFill>
+                  <a:srgbClr val="334155"/>
+                </a:solidFill>
+                <a:latin typeface="Noto Sans TC"/>
+              </a:rPr>
+              <a:t>」，</a:t>
+            </a:r>
+            <a:r>
+              <a:rPr sz="1350" b="0" i="0" u="none" dirty="0" err="1">
+                <a:solidFill>
+                  <a:srgbClr val="334155"/>
+                </a:solidFill>
+                <a:latin typeface="Noto Sans TC"/>
+              </a:rPr>
+              <a:t>但不懂真實物理原理</a:t>
+            </a:r>
+            <a:r>
+              <a:rPr sz="1350" b="0" i="0" u="none" dirty="0">
+                <a:solidFill>
+                  <a:srgbClr val="334155"/>
+                </a:solidFill>
+                <a:latin typeface="Noto Sans TC"/>
+              </a:rPr>
+              <a:t>。</a:t>
             </a:r>
           </a:p>
         </p:txBody>
@@ -7198,26 +7525,90 @@
               </a:lnSpc>
             </a:pPr>
             <a:r>
-              <a:rPr sz="1350" b="1" i="0" u="none">
+              <a:rPr sz="1350" b="1" i="0" u="none" dirty="0">
                 <a:solidFill>
                   <a:srgbClr val="334155"/>
                 </a:solidFill>
                 <a:latin typeface="Noto Sans TC"/>
               </a:rPr>
-              <a:t>2. Softmax 的強迫選擇</a:t>
-            </a:r>
-            <a:r>
+              <a:t>2. </a:t>
+            </a:r>
+            <a:r>
+              <a:rPr sz="1350" b="1" i="0" u="none" dirty="0" err="1">
+                <a:solidFill>
+                  <a:srgbClr val="334155"/>
+                </a:solidFill>
+                <a:latin typeface="Noto Sans TC"/>
+              </a:rPr>
+              <a:t>Softmax</a:t>
+            </a:r>
+            <a:r>
+              <a:rPr sz="1350" b="1" i="0" u="none" dirty="0">
+                <a:solidFill>
+                  <a:srgbClr val="334155"/>
+                </a:solidFill>
+                <a:latin typeface="Noto Sans TC"/>
+              </a:rPr>
+              <a:t> </a:t>
+            </a:r>
+            <a:r>
+              <a:rPr sz="1350" b="1" i="0" u="none" dirty="0" err="1">
+                <a:solidFill>
+                  <a:srgbClr val="334155"/>
+                </a:solidFill>
+                <a:latin typeface="Noto Sans TC"/>
+              </a:rPr>
+              <a:t>的強迫選擇</a:t>
+            </a:r>
+            <a:r>
+              <a:rPr dirty="0"/>
               <a:t>
 </a:t>
             </a:r>
             <a:r>
-              <a:rPr sz="1350" b="0" i="0" u="none">
+              <a:rPr sz="1350" b="0" i="0" u="none" dirty="0">
                 <a:solidFill>
                   <a:srgbClr val="334155"/>
                 </a:solidFill>
                 <a:latin typeface="Noto Sans TC"/>
               </a:rPr>
-              <a:t> 即使沒有資料，Softmax 仍會硬湊出機率，假裝很有自信地瞎掰。</a:t>
+              <a:t> </a:t>
+            </a:r>
+            <a:r>
+              <a:rPr sz="1350" b="0" i="0" u="none" dirty="0" err="1">
+                <a:solidFill>
+                  <a:srgbClr val="334155"/>
+                </a:solidFill>
+                <a:latin typeface="Noto Sans TC"/>
+              </a:rPr>
+              <a:t>即使沒有資料，Softmax</a:t>
+            </a:r>
+            <a:r>
+              <a:rPr sz="1350" b="0" i="0" u="none" dirty="0">
+                <a:solidFill>
+                  <a:srgbClr val="334155"/>
+                </a:solidFill>
+                <a:latin typeface="Noto Sans TC"/>
+              </a:rPr>
+              <a:t> </a:t>
+            </a:r>
+            <a:r>
+              <a:rPr sz="1350" b="0" i="0" u="none" dirty="0" err="1">
+                <a:solidFill>
+                  <a:srgbClr val="334155"/>
+                </a:solidFill>
+                <a:latin typeface="Noto Sans TC"/>
+              </a:rPr>
+              <a:t>仍會硬湊出機率，假裝很有自信地瞎掰</a:t>
+            </a:r>
+            <a:r>
+              <a:rPr sz="1350" b="0" i="0" u="none" dirty="0">
+                <a:solidFill>
+                  <a:srgbClr val="334155"/>
+                </a:solidFill>
+                <a:latin typeface="Noto Sans TC"/>
+              </a:rPr>
+              <a:t>。</a:t>
             </a:r>
           </a:p>
         </p:txBody>
@@ -7250,26 +7641,63 @@
               </a:lnSpc>
             </a:pPr>
             <a:r>
-              <a:rPr sz="1350" b="1" i="0" u="none">
+              <a:rPr sz="1350" b="1" i="0" u="none" dirty="0">
                 <a:solidFill>
                   <a:srgbClr val="334155"/>
                 </a:solidFill>
                 <a:latin typeface="Noto Sans TC"/>
               </a:rPr>
-              <a:t>3. 骨牌效應 (Autoregressive Drift)</a:t>
-            </a:r>
-            <a:r>
+              <a:t>3. </a:t>
+            </a:r>
+            <a:r>
+              <a:rPr sz="1350" b="1" i="0" u="none" dirty="0" err="1">
+                <a:solidFill>
+                  <a:srgbClr val="334155"/>
+                </a:solidFill>
+                <a:latin typeface="Noto Sans TC"/>
+              </a:rPr>
+              <a:t>骨牌效應</a:t>
+            </a:r>
+            <a:r>
+              <a:rPr sz="1350" b="1" i="0" u="none" dirty="0">
+                <a:solidFill>
+                  <a:srgbClr val="334155"/>
+                </a:solidFill>
+                <a:latin typeface="Noto Sans TC"/>
+              </a:rPr>
+              <a:t> (Autoregressive Drift)</a:t>
+            </a:r>
+            <a:r>
+              <a:rPr dirty="0"/>
               <a:t>
 </a:t>
             </a:r>
             <a:r>
-              <a:rPr sz="1350" b="0" i="0" u="none">
+              <a:rPr sz="1350" b="0" i="0" u="none" dirty="0">
                 <a:solidFill>
                   <a:srgbClr val="334155"/>
                 </a:solidFill>
                 <a:latin typeface="Noto Sans TC"/>
               </a:rPr>
-              <a:t> 前面的年份寫錯，後續的字只能沿著錯誤繼續編造，無法回頭修正！</a:t>
+              <a:t> </a:t>
+            </a:r>
+            <a:r>
+              <a:rPr sz="1350" b="0" i="0" u="none" dirty="0" err="1">
+                <a:solidFill>
+                  <a:srgbClr val="334155"/>
+                </a:solidFill>
+                <a:latin typeface="Noto Sans TC"/>
+              </a:rPr>
+              <a:t>前面的年份寫錯，後續的字只能沿著錯誤繼續編造，無法回頭修正</a:t>
+            </a:r>
+            <a:r>
+              <a:rPr sz="1350" b="0" i="0" u="none" dirty="0">
+                <a:solidFill>
+                  <a:srgbClr val="334155"/>
+                </a:solidFill>
+                <a:latin typeface="Noto Sans TC"/>
+              </a:rPr>
+              <a:t>！</a:t>
             </a:r>
           </a:p>
         </p:txBody>
@@ -7279,6 +7707,18 @@
   <p:clrMapOvr>
     <a:masterClrMapping/>
   </p:clrMapOvr>
+  <mc:AlternateContent xmlns:mc="http://schemas.openxmlformats.org/markup-compatibility/2006">
+    <mc:Choice xmlns:p14="http://schemas.microsoft.com/office/powerpoint/2010/main" Requires="p14">
+      <p:transition spd="slow" p14:dur="2000">
+        <p:cut/>
+      </p:transition>
+    </mc:Choice>
+    <mc:Fallback>
+      <p:transition spd="slow">
+        <p:cut/>
+      </p:transition>
+    </mc:Fallback>
+  </mc:AlternateContent>
 </p:sld>
 </file>
 
